--- a/陪我走過春夏秋冬.pptx
+++ b/陪我走過春夏秋冬.pptx
@@ -216,7 +216,7 @@
             <a:fld id="{6E45087F-B3FD-489D-A87D-936C085A0E8E}" type="datetimeFigureOut">
               <a:rPr lang="zh-TW" altLang="en-US" smtClean="0"/>
               <a:pPr/>
-              <a:t>2022/9/24</a:t>
+              <a:t>2024/3/16</a:t>
             </a:fld>
             <a:endParaRPr lang="zh-TW" altLang="en-US"/>
           </a:p>
@@ -282,38 +282,37 @@
           <a:p>
             <a:pPr lvl="0"/>
             <a:r>
-              <a:rPr lang="zh-TW" altLang="en-US" smtClean="0"/>
+              <a:rPr lang="zh-TW" altLang="en-US"/>
               <a:t>按一下以編輯母片文字樣式</a:t>
             </a:r>
           </a:p>
           <a:p>
             <a:pPr lvl="1"/>
             <a:r>
-              <a:rPr lang="zh-TW" altLang="en-US" smtClean="0"/>
+              <a:rPr lang="zh-TW" altLang="en-US"/>
               <a:t>第二層</a:t>
             </a:r>
           </a:p>
           <a:p>
             <a:pPr lvl="2"/>
             <a:r>
-              <a:rPr lang="zh-TW" altLang="en-US" smtClean="0"/>
+              <a:rPr lang="zh-TW" altLang="en-US"/>
               <a:t>第三層</a:t>
             </a:r>
           </a:p>
           <a:p>
             <a:pPr lvl="3"/>
             <a:r>
-              <a:rPr lang="zh-TW" altLang="en-US" smtClean="0"/>
+              <a:rPr lang="zh-TW" altLang="en-US"/>
               <a:t>第四層</a:t>
             </a:r>
           </a:p>
           <a:p>
             <a:pPr lvl="4"/>
             <a:r>
-              <a:rPr lang="zh-TW" altLang="en-US" smtClean="0"/>
+              <a:rPr lang="zh-TW" altLang="en-US"/>
               <a:t>第五層</a:t>
             </a:r>
-            <a:endParaRPr lang="zh-TW" altLang="en-US"/>
           </a:p>
         </p:txBody>
       </p:sp>
@@ -520,10 +519,9 @@
           <a:lstStyle/>
           <a:p>
             <a:r>
-              <a:rPr lang="zh-TW" altLang="en-US" smtClean="0"/>
+              <a:rPr lang="zh-TW" altLang="en-US"/>
               <a:t>按一下以編輯母片標題樣式</a:t>
             </a:r>
-            <a:endParaRPr lang="zh-TW" altLang="en-US"/>
           </a:p>
         </p:txBody>
       </p:sp>
@@ -639,10 +637,9 @@
           </a:lstStyle>
           <a:p>
             <a:r>
-              <a:rPr lang="zh-TW" altLang="en-US" smtClean="0"/>
+              <a:rPr lang="zh-TW" altLang="en-US"/>
               <a:t>按一下以編輯母片副標題樣式</a:t>
             </a:r>
-            <a:endParaRPr lang="zh-TW" altLang="en-US"/>
           </a:p>
         </p:txBody>
       </p:sp>
@@ -664,7 +661,7 @@
             <a:fld id="{EB138149-9DB9-4E1D-80A0-D42E00719590}" type="datetimeFigureOut">
               <a:rPr lang="zh-TW" altLang="en-US" smtClean="0"/>
               <a:pPr/>
-              <a:t>2022/9/24</a:t>
+              <a:t>2024/3/16</a:t>
             </a:fld>
             <a:endParaRPr lang="zh-TW" altLang="en-US"/>
           </a:p>
@@ -754,10 +751,9 @@
           <a:lstStyle/>
           <a:p>
             <a:r>
-              <a:rPr lang="zh-TW" altLang="en-US" smtClean="0"/>
+              <a:rPr lang="zh-TW" altLang="en-US"/>
               <a:t>按一下以編輯母片標題樣式</a:t>
             </a:r>
-            <a:endParaRPr lang="zh-TW" altLang="en-US"/>
           </a:p>
         </p:txBody>
       </p:sp>
@@ -778,38 +774,37 @@
           <a:p>
             <a:pPr lvl="0"/>
             <a:r>
-              <a:rPr lang="zh-TW" altLang="en-US" smtClean="0"/>
+              <a:rPr lang="zh-TW" altLang="en-US"/>
               <a:t>按一下以編輯母片文字樣式</a:t>
             </a:r>
           </a:p>
           <a:p>
             <a:pPr lvl="1"/>
             <a:r>
-              <a:rPr lang="zh-TW" altLang="en-US" smtClean="0"/>
+              <a:rPr lang="zh-TW" altLang="en-US"/>
               <a:t>第二層</a:t>
             </a:r>
           </a:p>
           <a:p>
             <a:pPr lvl="2"/>
             <a:r>
-              <a:rPr lang="zh-TW" altLang="en-US" smtClean="0"/>
+              <a:rPr lang="zh-TW" altLang="en-US"/>
               <a:t>第三層</a:t>
             </a:r>
           </a:p>
           <a:p>
             <a:pPr lvl="3"/>
             <a:r>
-              <a:rPr lang="zh-TW" altLang="en-US" smtClean="0"/>
+              <a:rPr lang="zh-TW" altLang="en-US"/>
               <a:t>第四層</a:t>
             </a:r>
           </a:p>
           <a:p>
             <a:pPr lvl="4"/>
             <a:r>
-              <a:rPr lang="zh-TW" altLang="en-US" smtClean="0"/>
+              <a:rPr lang="zh-TW" altLang="en-US"/>
               <a:t>第五層</a:t>
             </a:r>
-            <a:endParaRPr lang="zh-TW" altLang="en-US"/>
           </a:p>
         </p:txBody>
       </p:sp>
@@ -831,7 +826,7 @@
             <a:fld id="{EB138149-9DB9-4E1D-80A0-D42E00719590}" type="datetimeFigureOut">
               <a:rPr lang="zh-TW" altLang="en-US" smtClean="0"/>
               <a:pPr/>
-              <a:t>2022/9/24</a:t>
+              <a:t>2024/3/16</a:t>
             </a:fld>
             <a:endParaRPr lang="zh-TW" altLang="en-US"/>
           </a:p>
@@ -926,10 +921,9 @@
           <a:lstStyle/>
           <a:p>
             <a:r>
-              <a:rPr lang="zh-TW" altLang="en-US" smtClean="0"/>
+              <a:rPr lang="zh-TW" altLang="en-US"/>
               <a:t>按一下以編輯母片標題樣式</a:t>
             </a:r>
-            <a:endParaRPr lang="zh-TW" altLang="en-US"/>
           </a:p>
         </p:txBody>
       </p:sp>
@@ -955,38 +949,37 @@
           <a:p>
             <a:pPr lvl="0"/>
             <a:r>
-              <a:rPr lang="zh-TW" altLang="en-US" smtClean="0"/>
+              <a:rPr lang="zh-TW" altLang="en-US"/>
               <a:t>按一下以編輯母片文字樣式</a:t>
             </a:r>
           </a:p>
           <a:p>
             <a:pPr lvl="1"/>
             <a:r>
-              <a:rPr lang="zh-TW" altLang="en-US" smtClean="0"/>
+              <a:rPr lang="zh-TW" altLang="en-US"/>
               <a:t>第二層</a:t>
             </a:r>
           </a:p>
           <a:p>
             <a:pPr lvl="2"/>
             <a:r>
-              <a:rPr lang="zh-TW" altLang="en-US" smtClean="0"/>
+              <a:rPr lang="zh-TW" altLang="en-US"/>
               <a:t>第三層</a:t>
             </a:r>
           </a:p>
           <a:p>
             <a:pPr lvl="3"/>
             <a:r>
-              <a:rPr lang="zh-TW" altLang="en-US" smtClean="0"/>
+              <a:rPr lang="zh-TW" altLang="en-US"/>
               <a:t>第四層</a:t>
             </a:r>
           </a:p>
           <a:p>
             <a:pPr lvl="4"/>
             <a:r>
-              <a:rPr lang="zh-TW" altLang="en-US" smtClean="0"/>
+              <a:rPr lang="zh-TW" altLang="en-US"/>
               <a:t>第五層</a:t>
             </a:r>
-            <a:endParaRPr lang="zh-TW" altLang="en-US"/>
           </a:p>
         </p:txBody>
       </p:sp>
@@ -1008,7 +1001,7 @@
             <a:fld id="{EB138149-9DB9-4E1D-80A0-D42E00719590}" type="datetimeFigureOut">
               <a:rPr lang="zh-TW" altLang="en-US" smtClean="0"/>
               <a:pPr/>
-              <a:t>2022/9/24</a:t>
+              <a:t>2024/3/16</a:t>
             </a:fld>
             <a:endParaRPr lang="zh-TW" altLang="en-US"/>
           </a:p>
@@ -1098,10 +1091,9 @@
           <a:lstStyle/>
           <a:p>
             <a:r>
-              <a:rPr lang="zh-TW" altLang="en-US" smtClean="0"/>
+              <a:rPr lang="zh-TW" altLang="en-US"/>
               <a:t>按一下以編輯母片標題樣式</a:t>
             </a:r>
-            <a:endParaRPr lang="zh-TW" altLang="en-US"/>
           </a:p>
         </p:txBody>
       </p:sp>
@@ -1122,38 +1114,37 @@
           <a:p>
             <a:pPr lvl="0"/>
             <a:r>
-              <a:rPr lang="zh-TW" altLang="en-US" smtClean="0"/>
+              <a:rPr lang="zh-TW" altLang="en-US"/>
               <a:t>按一下以編輯母片文字樣式</a:t>
             </a:r>
           </a:p>
           <a:p>
             <a:pPr lvl="1"/>
             <a:r>
-              <a:rPr lang="zh-TW" altLang="en-US" smtClean="0"/>
+              <a:rPr lang="zh-TW" altLang="en-US"/>
               <a:t>第二層</a:t>
             </a:r>
           </a:p>
           <a:p>
             <a:pPr lvl="2"/>
             <a:r>
-              <a:rPr lang="zh-TW" altLang="en-US" smtClean="0"/>
+              <a:rPr lang="zh-TW" altLang="en-US"/>
               <a:t>第三層</a:t>
             </a:r>
           </a:p>
           <a:p>
             <a:pPr lvl="3"/>
             <a:r>
-              <a:rPr lang="zh-TW" altLang="en-US" smtClean="0"/>
+              <a:rPr lang="zh-TW" altLang="en-US"/>
               <a:t>第四層</a:t>
             </a:r>
           </a:p>
           <a:p>
             <a:pPr lvl="4"/>
             <a:r>
-              <a:rPr lang="zh-TW" altLang="en-US" smtClean="0"/>
+              <a:rPr lang="zh-TW" altLang="en-US"/>
               <a:t>第五層</a:t>
             </a:r>
-            <a:endParaRPr lang="zh-TW" altLang="en-US"/>
           </a:p>
         </p:txBody>
       </p:sp>
@@ -1175,7 +1166,7 @@
             <a:fld id="{EB138149-9DB9-4E1D-80A0-D42E00719590}" type="datetimeFigureOut">
               <a:rPr lang="zh-TW" altLang="en-US" smtClean="0"/>
               <a:pPr/>
-              <a:t>2022/9/24</a:t>
+              <a:t>2024/3/16</a:t>
             </a:fld>
             <a:endParaRPr lang="zh-TW" altLang="en-US"/>
           </a:p>
@@ -1274,10 +1265,9 @@
           </a:lstStyle>
           <a:p>
             <a:r>
-              <a:rPr lang="zh-TW" altLang="en-US" smtClean="0"/>
+              <a:rPr lang="zh-TW" altLang="en-US"/>
               <a:t>按一下以編輯母片標題樣式</a:t>
             </a:r>
-            <a:endParaRPr lang="zh-TW" altLang="en-US"/>
           </a:p>
         </p:txBody>
       </p:sp>
@@ -1394,7 +1384,7 @@
           <a:p>
             <a:pPr lvl="0"/>
             <a:r>
-              <a:rPr lang="zh-TW" altLang="en-US" smtClean="0"/>
+              <a:rPr lang="zh-TW" altLang="en-US"/>
               <a:t>按一下以編輯母片文字樣式</a:t>
             </a:r>
           </a:p>
@@ -1418,7 +1408,7 @@
             <a:fld id="{EB138149-9DB9-4E1D-80A0-D42E00719590}" type="datetimeFigureOut">
               <a:rPr lang="zh-TW" altLang="en-US" smtClean="0"/>
               <a:pPr/>
-              <a:t>2022/9/24</a:t>
+              <a:t>2024/3/16</a:t>
             </a:fld>
             <a:endParaRPr lang="zh-TW" altLang="en-US"/>
           </a:p>
@@ -1508,10 +1498,9 @@
           <a:lstStyle/>
           <a:p>
             <a:r>
-              <a:rPr lang="zh-TW" altLang="en-US" smtClean="0"/>
+              <a:rPr lang="zh-TW" altLang="en-US"/>
               <a:t>按一下以編輯母片標題樣式</a:t>
             </a:r>
-            <a:endParaRPr lang="zh-TW" altLang="en-US"/>
           </a:p>
         </p:txBody>
       </p:sp>
@@ -1565,38 +1554,37 @@
           <a:p>
             <a:pPr lvl="0"/>
             <a:r>
-              <a:rPr lang="zh-TW" altLang="en-US" smtClean="0"/>
+              <a:rPr lang="zh-TW" altLang="en-US"/>
               <a:t>按一下以編輯母片文字樣式</a:t>
             </a:r>
           </a:p>
           <a:p>
             <a:pPr lvl="1"/>
             <a:r>
-              <a:rPr lang="zh-TW" altLang="en-US" smtClean="0"/>
+              <a:rPr lang="zh-TW" altLang="en-US"/>
               <a:t>第二層</a:t>
             </a:r>
           </a:p>
           <a:p>
             <a:pPr lvl="2"/>
             <a:r>
-              <a:rPr lang="zh-TW" altLang="en-US" smtClean="0"/>
+              <a:rPr lang="zh-TW" altLang="en-US"/>
               <a:t>第三層</a:t>
             </a:r>
           </a:p>
           <a:p>
             <a:pPr lvl="3"/>
             <a:r>
-              <a:rPr lang="zh-TW" altLang="en-US" smtClean="0"/>
+              <a:rPr lang="zh-TW" altLang="en-US"/>
               <a:t>第四層</a:t>
             </a:r>
           </a:p>
           <a:p>
             <a:pPr lvl="4"/>
             <a:r>
-              <a:rPr lang="zh-TW" altLang="en-US" smtClean="0"/>
+              <a:rPr lang="zh-TW" altLang="en-US"/>
               <a:t>第五層</a:t>
             </a:r>
-            <a:endParaRPr lang="zh-TW" altLang="en-US"/>
           </a:p>
         </p:txBody>
       </p:sp>
@@ -1650,38 +1638,37 @@
           <a:p>
             <a:pPr lvl="0"/>
             <a:r>
-              <a:rPr lang="zh-TW" altLang="en-US" smtClean="0"/>
+              <a:rPr lang="zh-TW" altLang="en-US"/>
               <a:t>按一下以編輯母片文字樣式</a:t>
             </a:r>
           </a:p>
           <a:p>
             <a:pPr lvl="1"/>
             <a:r>
-              <a:rPr lang="zh-TW" altLang="en-US" smtClean="0"/>
+              <a:rPr lang="zh-TW" altLang="en-US"/>
               <a:t>第二層</a:t>
             </a:r>
           </a:p>
           <a:p>
             <a:pPr lvl="2"/>
             <a:r>
-              <a:rPr lang="zh-TW" altLang="en-US" smtClean="0"/>
+              <a:rPr lang="zh-TW" altLang="en-US"/>
               <a:t>第三層</a:t>
             </a:r>
           </a:p>
           <a:p>
             <a:pPr lvl="3"/>
             <a:r>
-              <a:rPr lang="zh-TW" altLang="en-US" smtClean="0"/>
+              <a:rPr lang="zh-TW" altLang="en-US"/>
               <a:t>第四層</a:t>
             </a:r>
           </a:p>
           <a:p>
             <a:pPr lvl="4"/>
             <a:r>
-              <a:rPr lang="zh-TW" altLang="en-US" smtClean="0"/>
+              <a:rPr lang="zh-TW" altLang="en-US"/>
               <a:t>第五層</a:t>
             </a:r>
-            <a:endParaRPr lang="zh-TW" altLang="en-US"/>
           </a:p>
         </p:txBody>
       </p:sp>
@@ -1703,7 +1690,7 @@
             <a:fld id="{EB138149-9DB9-4E1D-80A0-D42E00719590}" type="datetimeFigureOut">
               <a:rPr lang="zh-TW" altLang="en-US" smtClean="0"/>
               <a:pPr/>
-              <a:t>2022/9/24</a:t>
+              <a:t>2024/3/16</a:t>
             </a:fld>
             <a:endParaRPr lang="zh-TW" altLang="en-US"/>
           </a:p>
@@ -1797,10 +1784,9 @@
           </a:lstStyle>
           <a:p>
             <a:r>
-              <a:rPr lang="zh-TW" altLang="en-US" smtClean="0"/>
+              <a:rPr lang="zh-TW" altLang="en-US"/>
               <a:t>按一下以編輯母片標題樣式</a:t>
             </a:r>
-            <a:endParaRPr lang="zh-TW" altLang="en-US"/>
           </a:p>
         </p:txBody>
       </p:sp>
@@ -1863,7 +1849,7 @@
           <a:p>
             <a:pPr lvl="0"/>
             <a:r>
-              <a:rPr lang="zh-TW" altLang="en-US" smtClean="0"/>
+              <a:rPr lang="zh-TW" altLang="en-US"/>
               <a:t>按一下以編輯母片文字樣式</a:t>
             </a:r>
           </a:p>
@@ -1919,38 +1905,37 @@
           <a:p>
             <a:pPr lvl="0"/>
             <a:r>
-              <a:rPr lang="zh-TW" altLang="en-US" smtClean="0"/>
+              <a:rPr lang="zh-TW" altLang="en-US"/>
               <a:t>按一下以編輯母片文字樣式</a:t>
             </a:r>
           </a:p>
           <a:p>
             <a:pPr lvl="1"/>
             <a:r>
-              <a:rPr lang="zh-TW" altLang="en-US" smtClean="0"/>
+              <a:rPr lang="zh-TW" altLang="en-US"/>
               <a:t>第二層</a:t>
             </a:r>
           </a:p>
           <a:p>
             <a:pPr lvl="2"/>
             <a:r>
-              <a:rPr lang="zh-TW" altLang="en-US" smtClean="0"/>
+              <a:rPr lang="zh-TW" altLang="en-US"/>
               <a:t>第三層</a:t>
             </a:r>
           </a:p>
           <a:p>
             <a:pPr lvl="3"/>
             <a:r>
-              <a:rPr lang="zh-TW" altLang="en-US" smtClean="0"/>
+              <a:rPr lang="zh-TW" altLang="en-US"/>
               <a:t>第四層</a:t>
             </a:r>
           </a:p>
           <a:p>
             <a:pPr lvl="4"/>
             <a:r>
-              <a:rPr lang="zh-TW" altLang="en-US" smtClean="0"/>
+              <a:rPr lang="zh-TW" altLang="en-US"/>
               <a:t>第五層</a:t>
             </a:r>
-            <a:endParaRPr lang="zh-TW" altLang="en-US"/>
           </a:p>
         </p:txBody>
       </p:sp>
@@ -2013,7 +1998,7 @@
           <a:p>
             <a:pPr lvl="0"/>
             <a:r>
-              <a:rPr lang="zh-TW" altLang="en-US" smtClean="0"/>
+              <a:rPr lang="zh-TW" altLang="en-US"/>
               <a:t>按一下以編輯母片文字樣式</a:t>
             </a:r>
           </a:p>
@@ -2069,38 +2054,37 @@
           <a:p>
             <a:pPr lvl="0"/>
             <a:r>
-              <a:rPr lang="zh-TW" altLang="en-US" smtClean="0"/>
+              <a:rPr lang="zh-TW" altLang="en-US"/>
               <a:t>按一下以編輯母片文字樣式</a:t>
             </a:r>
           </a:p>
           <a:p>
             <a:pPr lvl="1"/>
             <a:r>
-              <a:rPr lang="zh-TW" altLang="en-US" smtClean="0"/>
+              <a:rPr lang="zh-TW" altLang="en-US"/>
               <a:t>第二層</a:t>
             </a:r>
           </a:p>
           <a:p>
             <a:pPr lvl="2"/>
             <a:r>
-              <a:rPr lang="zh-TW" altLang="en-US" smtClean="0"/>
+              <a:rPr lang="zh-TW" altLang="en-US"/>
               <a:t>第三層</a:t>
             </a:r>
           </a:p>
           <a:p>
             <a:pPr lvl="3"/>
             <a:r>
-              <a:rPr lang="zh-TW" altLang="en-US" smtClean="0"/>
+              <a:rPr lang="zh-TW" altLang="en-US"/>
               <a:t>第四層</a:t>
             </a:r>
           </a:p>
           <a:p>
             <a:pPr lvl="4"/>
             <a:r>
-              <a:rPr lang="zh-TW" altLang="en-US" smtClean="0"/>
+              <a:rPr lang="zh-TW" altLang="en-US"/>
               <a:t>第五層</a:t>
             </a:r>
-            <a:endParaRPr lang="zh-TW" altLang="en-US"/>
           </a:p>
         </p:txBody>
       </p:sp>
@@ -2122,7 +2106,7 @@
             <a:fld id="{EB138149-9DB9-4E1D-80A0-D42E00719590}" type="datetimeFigureOut">
               <a:rPr lang="zh-TW" altLang="en-US" smtClean="0"/>
               <a:pPr/>
-              <a:t>2022/9/24</a:t>
+              <a:t>2024/3/16</a:t>
             </a:fld>
             <a:endParaRPr lang="zh-TW" altLang="en-US"/>
           </a:p>
@@ -2212,10 +2196,9 @@
           <a:lstStyle/>
           <a:p>
             <a:r>
-              <a:rPr lang="zh-TW" altLang="en-US" smtClean="0"/>
+              <a:rPr lang="zh-TW" altLang="en-US"/>
               <a:t>按一下以編輯母片標題樣式</a:t>
             </a:r>
-            <a:endParaRPr lang="zh-TW" altLang="en-US"/>
           </a:p>
         </p:txBody>
       </p:sp>
@@ -2237,7 +2220,7 @@
             <a:fld id="{EB138149-9DB9-4E1D-80A0-D42E00719590}" type="datetimeFigureOut">
               <a:rPr lang="zh-TW" altLang="en-US" smtClean="0"/>
               <a:pPr/>
-              <a:t>2022/9/24</a:t>
+              <a:t>2024/3/16</a:t>
             </a:fld>
             <a:endParaRPr lang="zh-TW" altLang="en-US"/>
           </a:p>
@@ -2329,7 +2312,7 @@
             <a:fld id="{EB138149-9DB9-4E1D-80A0-D42E00719590}" type="datetimeFigureOut">
               <a:rPr lang="zh-TW" altLang="en-US" smtClean="0"/>
               <a:pPr/>
-              <a:t>2022/9/24</a:t>
+              <a:t>2024/3/16</a:t>
             </a:fld>
             <a:endParaRPr lang="zh-TW" altLang="en-US"/>
           </a:p>
@@ -2428,10 +2411,9 @@
           </a:lstStyle>
           <a:p>
             <a:r>
-              <a:rPr lang="zh-TW" altLang="en-US" smtClean="0"/>
+              <a:rPr lang="zh-TW" altLang="en-US"/>
               <a:t>按一下以編輯母片標題樣式</a:t>
             </a:r>
-            <a:endParaRPr lang="zh-TW" altLang="en-US"/>
           </a:p>
         </p:txBody>
       </p:sp>
@@ -2485,38 +2467,37 @@
           <a:p>
             <a:pPr lvl="0"/>
             <a:r>
-              <a:rPr lang="zh-TW" altLang="en-US" smtClean="0"/>
+              <a:rPr lang="zh-TW" altLang="en-US"/>
               <a:t>按一下以編輯母片文字樣式</a:t>
             </a:r>
           </a:p>
           <a:p>
             <a:pPr lvl="1"/>
             <a:r>
-              <a:rPr lang="zh-TW" altLang="en-US" smtClean="0"/>
+              <a:rPr lang="zh-TW" altLang="en-US"/>
               <a:t>第二層</a:t>
             </a:r>
           </a:p>
           <a:p>
             <a:pPr lvl="2"/>
             <a:r>
-              <a:rPr lang="zh-TW" altLang="en-US" smtClean="0"/>
+              <a:rPr lang="zh-TW" altLang="en-US"/>
               <a:t>第三層</a:t>
             </a:r>
           </a:p>
           <a:p>
             <a:pPr lvl="3"/>
             <a:r>
-              <a:rPr lang="zh-TW" altLang="en-US" smtClean="0"/>
+              <a:rPr lang="zh-TW" altLang="en-US"/>
               <a:t>第四層</a:t>
             </a:r>
           </a:p>
           <a:p>
             <a:pPr lvl="4"/>
             <a:r>
-              <a:rPr lang="zh-TW" altLang="en-US" smtClean="0"/>
+              <a:rPr lang="zh-TW" altLang="en-US"/>
               <a:t>第五層</a:t>
             </a:r>
-            <a:endParaRPr lang="zh-TW" altLang="en-US"/>
           </a:p>
         </p:txBody>
       </p:sp>
@@ -2579,7 +2560,7 @@
           <a:p>
             <a:pPr lvl="0"/>
             <a:r>
-              <a:rPr lang="zh-TW" altLang="en-US" smtClean="0"/>
+              <a:rPr lang="zh-TW" altLang="en-US"/>
               <a:t>按一下以編輯母片文字樣式</a:t>
             </a:r>
           </a:p>
@@ -2603,7 +2584,7 @@
             <a:fld id="{EB138149-9DB9-4E1D-80A0-D42E00719590}" type="datetimeFigureOut">
               <a:rPr lang="zh-TW" altLang="en-US" smtClean="0"/>
               <a:pPr/>
-              <a:t>2022/9/24</a:t>
+              <a:t>2024/3/16</a:t>
             </a:fld>
             <a:endParaRPr lang="zh-TW" altLang="en-US"/>
           </a:p>
@@ -2702,10 +2683,9 @@
           </a:lstStyle>
           <a:p>
             <a:r>
-              <a:rPr lang="zh-TW" altLang="en-US" smtClean="0"/>
+              <a:rPr lang="zh-TW" altLang="en-US"/>
               <a:t>按一下以編輯母片標題樣式</a:t>
             </a:r>
-            <a:endParaRPr lang="zh-TW" altLang="en-US"/>
           </a:p>
         </p:txBody>
       </p:sp>
@@ -2767,10 +2747,9 @@
           </a:lstStyle>
           <a:p>
             <a:r>
-              <a:rPr lang="zh-TW" altLang="en-US" smtClean="0"/>
+              <a:rPr lang="zh-TW" altLang="en-US"/>
               <a:t>按一下圖示以新增圖片</a:t>
             </a:r>
-            <a:endParaRPr lang="zh-TW" altLang="en-US"/>
           </a:p>
         </p:txBody>
       </p:sp>
@@ -2833,7 +2812,7 @@
           <a:p>
             <a:pPr lvl="0"/>
             <a:r>
-              <a:rPr lang="zh-TW" altLang="en-US" smtClean="0"/>
+              <a:rPr lang="zh-TW" altLang="en-US"/>
               <a:t>按一下以編輯母片文字樣式</a:t>
             </a:r>
           </a:p>
@@ -2857,7 +2836,7 @@
             <a:fld id="{EB138149-9DB9-4E1D-80A0-D42E00719590}" type="datetimeFigureOut">
               <a:rPr lang="zh-TW" altLang="en-US" smtClean="0"/>
               <a:pPr/>
-              <a:t>2022/9/24</a:t>
+              <a:t>2024/3/16</a:t>
             </a:fld>
             <a:endParaRPr lang="zh-TW" altLang="en-US"/>
           </a:p>
@@ -2967,10 +2946,9 @@
           <a:lstStyle/>
           <a:p>
             <a:r>
-              <a:rPr lang="zh-TW" altLang="en-US" smtClean="0"/>
+              <a:rPr lang="zh-TW" altLang="en-US"/>
               <a:t>按一下以編輯母片標題樣式</a:t>
             </a:r>
-            <a:endParaRPr lang="zh-TW" altLang="en-US"/>
           </a:p>
         </p:txBody>
       </p:sp>
@@ -3001,38 +2979,37 @@
           <a:p>
             <a:pPr lvl="0"/>
             <a:r>
-              <a:rPr lang="zh-TW" altLang="en-US" smtClean="0"/>
+              <a:rPr lang="zh-TW" altLang="en-US"/>
               <a:t>按一下以編輯母片文字樣式</a:t>
             </a:r>
           </a:p>
           <a:p>
             <a:pPr lvl="1"/>
             <a:r>
-              <a:rPr lang="zh-TW" altLang="en-US" smtClean="0"/>
+              <a:rPr lang="zh-TW" altLang="en-US"/>
               <a:t>第二層</a:t>
             </a:r>
           </a:p>
           <a:p>
             <a:pPr lvl="2"/>
             <a:r>
-              <a:rPr lang="zh-TW" altLang="en-US" smtClean="0"/>
+              <a:rPr lang="zh-TW" altLang="en-US"/>
               <a:t>第三層</a:t>
             </a:r>
           </a:p>
           <a:p>
             <a:pPr lvl="3"/>
             <a:r>
-              <a:rPr lang="zh-TW" altLang="en-US" smtClean="0"/>
+              <a:rPr lang="zh-TW" altLang="en-US"/>
               <a:t>第四層</a:t>
             </a:r>
           </a:p>
           <a:p>
             <a:pPr lvl="4"/>
             <a:r>
-              <a:rPr lang="zh-TW" altLang="en-US" smtClean="0"/>
+              <a:rPr lang="zh-TW" altLang="en-US"/>
               <a:t>第五層</a:t>
             </a:r>
-            <a:endParaRPr lang="zh-TW" altLang="en-US"/>
           </a:p>
         </p:txBody>
       </p:sp>
@@ -3072,7 +3049,7 @@
             <a:fld id="{EB138149-9DB9-4E1D-80A0-D42E00719590}" type="datetimeFigureOut">
               <a:rPr lang="zh-TW" altLang="en-US" smtClean="0"/>
               <a:pPr/>
-              <a:t>2022/9/24</a:t>
+              <a:t>2024/3/16</a:t>
             </a:fld>
             <a:endParaRPr lang="zh-TW" altLang="en-US"/>
           </a:p>
@@ -3480,24 +3457,7 @@
                 <a:latin typeface="微軟正黑體" pitchFamily="34" charset="-120"/>
                 <a:ea typeface="微軟正黑體" pitchFamily="34" charset="-120"/>
               </a:rPr>
-              <a:t>陪</a:t>
-            </a:r>
-            <a:r>
-              <a:rPr lang="zh-TW" altLang="en-US" sz="7200" b="1" i="1" dirty="0">
-                <a:solidFill>
-                  <a:srgbClr val="000066"/>
-                </a:solidFill>
-                <a:effectLst>
-                  <a:outerShdw blurRad="38100" dist="38100" dir="2700000" algn="tl">
-                    <a:srgbClr val="000000">
-                      <a:alpha val="43137"/>
-                    </a:srgbClr>
-                  </a:outerShdw>
-                </a:effectLst>
-                <a:latin typeface="微軟正黑體" pitchFamily="34" charset="-120"/>
-                <a:ea typeface="微軟正黑體" pitchFamily="34" charset="-120"/>
-              </a:rPr>
-              <a:t>我走過春夏秋冬</a:t>
+              <a:t>陪我走過春夏秋冬</a:t>
             </a:r>
           </a:p>
         </p:txBody>
@@ -3608,7 +3568,7 @@
         <p:spPr>
           <a:xfrm>
             <a:off x="0" y="5157192"/>
-            <a:ext cx="12192000" cy="748988"/>
+            <a:ext cx="12192000" cy="646331"/>
           </a:xfrm>
           <a:prstGeom prst="rect">
             <a:avLst/>
@@ -3623,7 +3583,7 @@
           <a:p>
             <a:pPr algn="ctr"/>
             <a:r>
-              <a:rPr lang="en-US" sz="4267" b="1" dirty="0">
+              <a:rPr lang="en-US" sz="3600" b="1" dirty="0">
                 <a:solidFill>
                   <a:srgbClr val="000066"/>
                 </a:solidFill>
@@ -3633,17 +3593,17 @@
               <a:t>( </a:t>
             </a:r>
             <a:r>
-              <a:rPr lang="zh-CN" altLang="en-US" sz="4267" b="1" dirty="0">
+              <a:rPr lang="zh-CN" altLang="en-US" sz="3600" b="1" dirty="0">
                 <a:solidFill>
                   <a:srgbClr val="000066"/>
                 </a:solidFill>
                 <a:latin typeface="Microsoft JhengHei" panose="020B0604030504040204" pitchFamily="34" charset="-120"/>
                 <a:ea typeface="Microsoft JhengHei" panose="020B0604030504040204" pitchFamily="34" charset="-120"/>
               </a:rPr>
-              <a:t>正</a:t>
-            </a:r>
-            <a:r>
-              <a:rPr lang="en-US" sz="4267" b="1" dirty="0">
+              <a:t>正歌</a:t>
+            </a:r>
+            <a:r>
+              <a:rPr lang="en-US" sz="3600" b="1" dirty="0">
                 <a:solidFill>
                   <a:srgbClr val="000066"/>
                 </a:solidFill>
@@ -3652,7 +3612,7 @@
               </a:rPr>
               <a:t> )</a:t>
             </a:r>
-            <a:endParaRPr lang="vi-VN" sz="4267" b="1" dirty="0">
+            <a:endParaRPr lang="vi-VN" sz="3600" b="1" dirty="0">
               <a:solidFill>
                 <a:srgbClr val="000066"/>
               </a:solidFill>
@@ -3767,7 +3727,7 @@
         <p:spPr>
           <a:xfrm>
             <a:off x="0" y="5157192"/>
-            <a:ext cx="12192000" cy="748988"/>
+            <a:ext cx="12192000" cy="646331"/>
           </a:xfrm>
           <a:prstGeom prst="rect">
             <a:avLst/>
@@ -3782,7 +3742,7 @@
           <a:p>
             <a:pPr algn="ctr"/>
             <a:r>
-              <a:rPr lang="en-US" sz="4267" b="1" dirty="0">
+              <a:rPr lang="en-US" sz="3600" b="1" dirty="0">
                 <a:solidFill>
                   <a:srgbClr val="000066"/>
                 </a:solidFill>
@@ -3792,17 +3752,17 @@
               <a:t>( </a:t>
             </a:r>
             <a:r>
-              <a:rPr lang="zh-CN" altLang="en-US" sz="4267" b="1" dirty="0">
+              <a:rPr lang="zh-CN" altLang="en-US" sz="3600" b="1" dirty="0">
                 <a:solidFill>
                   <a:srgbClr val="000066"/>
                 </a:solidFill>
                 <a:latin typeface="Microsoft JhengHei" panose="020B0604030504040204" pitchFamily="34" charset="-120"/>
                 <a:ea typeface="Microsoft JhengHei" panose="020B0604030504040204" pitchFamily="34" charset="-120"/>
               </a:rPr>
-              <a:t>正</a:t>
-            </a:r>
-            <a:r>
-              <a:rPr lang="en-US" sz="4267" b="1" dirty="0">
+              <a:t>正歌</a:t>
+            </a:r>
+            <a:r>
+              <a:rPr lang="en-US" sz="3600" b="1" dirty="0">
                 <a:solidFill>
                   <a:srgbClr val="000066"/>
                 </a:solidFill>
@@ -3811,7 +3771,7 @@
               </a:rPr>
               <a:t> )</a:t>
             </a:r>
-            <a:endParaRPr lang="vi-VN" sz="4267" b="1" dirty="0">
+            <a:endParaRPr lang="vi-VN" sz="3600" b="1" dirty="0">
               <a:solidFill>
                 <a:srgbClr val="000066"/>
               </a:solidFill>
@@ -3966,7 +3926,7 @@
         <p:spPr>
           <a:xfrm>
             <a:off x="0" y="5157192"/>
-            <a:ext cx="12192000" cy="748988"/>
+            <a:ext cx="12192000" cy="646331"/>
           </a:xfrm>
           <a:prstGeom prst="rect">
             <a:avLst/>
@@ -3981,7 +3941,7 @@
           <a:p>
             <a:pPr algn="ctr"/>
             <a:r>
-              <a:rPr lang="en-US" sz="4267" b="1" dirty="0">
+              <a:rPr lang="en-US" sz="3600" b="1" dirty="0">
                 <a:solidFill>
                   <a:srgbClr val="000066"/>
                 </a:solidFill>
@@ -3991,17 +3951,17 @@
               <a:t>( </a:t>
             </a:r>
             <a:r>
-              <a:rPr lang="zh-CN" altLang="en-US" sz="4267" b="1" dirty="0">
+              <a:rPr lang="zh-CN" altLang="en-US" sz="3600" b="1" dirty="0">
                 <a:solidFill>
                   <a:srgbClr val="000066"/>
                 </a:solidFill>
                 <a:latin typeface="Microsoft JhengHei" panose="020B0604030504040204" pitchFamily="34" charset="-120"/>
                 <a:ea typeface="Microsoft JhengHei" panose="020B0604030504040204" pitchFamily="34" charset="-120"/>
               </a:rPr>
-              <a:t>正</a:t>
-            </a:r>
-            <a:r>
-              <a:rPr lang="en-US" sz="4267" b="1" dirty="0">
+              <a:t>正歌</a:t>
+            </a:r>
+            <a:r>
+              <a:rPr lang="en-US" sz="3600" b="1" dirty="0">
                 <a:solidFill>
                   <a:srgbClr val="000066"/>
                 </a:solidFill>
@@ -4010,7 +3970,7 @@
               </a:rPr>
               <a:t> )</a:t>
             </a:r>
-            <a:endParaRPr lang="vi-VN" sz="4267" b="1" dirty="0">
+            <a:endParaRPr lang="vi-VN" sz="3600" b="1" dirty="0">
               <a:solidFill>
                 <a:srgbClr val="000066"/>
               </a:solidFill>
@@ -4125,7 +4085,7 @@
         <p:spPr>
           <a:xfrm>
             <a:off x="0" y="5157192"/>
-            <a:ext cx="12192000" cy="748988"/>
+            <a:ext cx="12192000" cy="646331"/>
           </a:xfrm>
           <a:prstGeom prst="rect">
             <a:avLst/>
@@ -4140,7 +4100,7 @@
           <a:p>
             <a:pPr algn="ctr"/>
             <a:r>
-              <a:rPr lang="en-US" sz="4267" b="1" dirty="0">
+              <a:rPr lang="en-US" sz="3600" b="1" dirty="0">
                 <a:solidFill>
                   <a:srgbClr val="000066"/>
                 </a:solidFill>
@@ -4150,17 +4110,17 @@
               <a:t>( </a:t>
             </a:r>
             <a:r>
-              <a:rPr lang="zh-CN" altLang="en-US" sz="4267" b="1" dirty="0">
+              <a:rPr lang="zh-CN" altLang="en-US" sz="3600" b="1" dirty="0">
                 <a:solidFill>
                   <a:srgbClr val="000066"/>
                 </a:solidFill>
                 <a:latin typeface="Microsoft JhengHei" panose="020B0604030504040204" pitchFamily="34" charset="-120"/>
                 <a:ea typeface="Microsoft JhengHei" panose="020B0604030504040204" pitchFamily="34" charset="-120"/>
               </a:rPr>
-              <a:t>副</a:t>
-            </a:r>
-            <a:r>
-              <a:rPr lang="en-US" sz="4267" b="1" dirty="0">
+              <a:t>副歌</a:t>
+            </a:r>
+            <a:r>
+              <a:rPr lang="en-US" sz="3600" b="1" dirty="0">
                 <a:solidFill>
                   <a:srgbClr val="000066"/>
                 </a:solidFill>
@@ -4169,7 +4129,7 @@
               </a:rPr>
               <a:t> )</a:t>
             </a:r>
-            <a:endParaRPr lang="vi-VN" sz="4267" b="1" dirty="0">
+            <a:endParaRPr lang="vi-VN" sz="3600" b="1" dirty="0">
               <a:solidFill>
                 <a:srgbClr val="000066"/>
               </a:solidFill>
@@ -4284,7 +4244,7 @@
         <p:spPr>
           <a:xfrm>
             <a:off x="0" y="5157192"/>
-            <a:ext cx="12192000" cy="748988"/>
+            <a:ext cx="12192000" cy="646331"/>
           </a:xfrm>
           <a:prstGeom prst="rect">
             <a:avLst/>
@@ -4299,7 +4259,7 @@
           <a:p>
             <a:pPr algn="ctr"/>
             <a:r>
-              <a:rPr lang="en-US" sz="4267" b="1" dirty="0">
+              <a:rPr lang="en-US" sz="3600" b="1" dirty="0">
                 <a:solidFill>
                   <a:srgbClr val="000066"/>
                 </a:solidFill>
@@ -4309,17 +4269,17 @@
               <a:t>( </a:t>
             </a:r>
             <a:r>
-              <a:rPr lang="zh-CN" altLang="en-US" sz="4267" b="1" dirty="0">
+              <a:rPr lang="zh-CN" altLang="en-US" sz="3600" b="1" dirty="0">
                 <a:solidFill>
                   <a:srgbClr val="000066"/>
                 </a:solidFill>
                 <a:latin typeface="Microsoft JhengHei" panose="020B0604030504040204" pitchFamily="34" charset="-120"/>
                 <a:ea typeface="Microsoft JhengHei" panose="020B0604030504040204" pitchFamily="34" charset="-120"/>
               </a:rPr>
-              <a:t>副</a:t>
-            </a:r>
-            <a:r>
-              <a:rPr lang="en-US" sz="4267" b="1" dirty="0">
+              <a:t>副歌</a:t>
+            </a:r>
+            <a:r>
+              <a:rPr lang="en-US" sz="3600" b="1" dirty="0">
                 <a:solidFill>
                   <a:srgbClr val="000066"/>
                 </a:solidFill>
@@ -4328,7 +4288,7 @@
               </a:rPr>
               <a:t> )</a:t>
             </a:r>
-            <a:endParaRPr lang="vi-VN" sz="4267" b="1" dirty="0">
+            <a:endParaRPr lang="vi-VN" sz="3600" b="1" dirty="0">
               <a:solidFill>
                 <a:srgbClr val="000066"/>
               </a:solidFill>
@@ -4463,7 +4423,7 @@
         <p:spPr>
           <a:xfrm>
             <a:off x="0" y="5157192"/>
-            <a:ext cx="12192000" cy="748988"/>
+            <a:ext cx="12192000" cy="646331"/>
           </a:xfrm>
           <a:prstGeom prst="rect">
             <a:avLst/>
@@ -4478,7 +4438,7 @@
           <a:p>
             <a:pPr algn="ctr"/>
             <a:r>
-              <a:rPr lang="en-US" sz="4267" b="1" dirty="0">
+              <a:rPr lang="en-US" sz="3600" b="1" dirty="0">
                 <a:solidFill>
                   <a:srgbClr val="000066"/>
                 </a:solidFill>
@@ -4488,7 +4448,7 @@
               <a:t>( </a:t>
             </a:r>
             <a:r>
-              <a:rPr lang="zh-CN" altLang="en-US" sz="4267" b="1" dirty="0">
+              <a:rPr lang="zh-CN" altLang="en-US" sz="3600" b="1" dirty="0">
                 <a:solidFill>
                   <a:srgbClr val="000066"/>
                 </a:solidFill>
@@ -4498,7 +4458,7 @@
               <a:t>橋</a:t>
             </a:r>
             <a:r>
-              <a:rPr lang="en-US" sz="4267" b="1" dirty="0">
+              <a:rPr lang="en-US" sz="3600" b="1" dirty="0">
                 <a:solidFill>
                   <a:srgbClr val="000066"/>
                 </a:solidFill>
@@ -4507,7 +4467,7 @@
               </a:rPr>
               <a:t> )</a:t>
             </a:r>
-            <a:endParaRPr lang="vi-VN" sz="4267" b="1" dirty="0">
+            <a:endParaRPr lang="vi-VN" sz="3600" b="1" dirty="0">
               <a:solidFill>
                 <a:srgbClr val="000066"/>
               </a:solidFill>
@@ -4642,7 +4602,7 @@
         <p:spPr>
           <a:xfrm>
             <a:off x="0" y="5157192"/>
-            <a:ext cx="12192000" cy="748988"/>
+            <a:ext cx="12192000" cy="646331"/>
           </a:xfrm>
           <a:prstGeom prst="rect">
             <a:avLst/>
@@ -4657,7 +4617,7 @@
           <a:p>
             <a:pPr algn="ctr"/>
             <a:r>
-              <a:rPr lang="en-US" sz="4267" b="1" dirty="0">
+              <a:rPr lang="en-US" sz="3600" b="1" dirty="0">
                 <a:solidFill>
                   <a:srgbClr val="000066"/>
                 </a:solidFill>
@@ -4667,7 +4627,7 @@
               <a:t>( </a:t>
             </a:r>
             <a:r>
-              <a:rPr lang="zh-CN" altLang="en-US" sz="4267" b="1" dirty="0">
+              <a:rPr lang="zh-CN" altLang="en-US" sz="3600" b="1" dirty="0">
                 <a:solidFill>
                   <a:srgbClr val="000066"/>
                 </a:solidFill>
@@ -4677,7 +4637,7 @@
               <a:t>橋</a:t>
             </a:r>
             <a:r>
-              <a:rPr lang="en-US" sz="4267" b="1" dirty="0">
+              <a:rPr lang="en-US" sz="3600" b="1" dirty="0">
                 <a:solidFill>
                   <a:srgbClr val="000066"/>
                 </a:solidFill>
@@ -4686,7 +4646,7 @@
               </a:rPr>
               <a:t> )</a:t>
             </a:r>
-            <a:endParaRPr lang="vi-VN" sz="4267" b="1" dirty="0">
+            <a:endParaRPr lang="vi-VN" sz="3600" b="1" dirty="0">
               <a:solidFill>
                 <a:srgbClr val="000066"/>
               </a:solidFill>
